--- a/system-design-101/vi/lessons/sd-01-024/slides/sd-01-024.pptx
+++ b/system-design-101/vi/lessons/sd-01-024/slides/sd-01-024.pptx
@@ -2837,6 +2837,28 @@
               <a:t> phải</a:t>
             </a:r>
             <a:r>
+              <a:rPr lang="en-US" sz="2700" dirty="0" spc="0" kern="0">
+                <a:solidFill>
+                  <a:srgbClr val="3B3A37"/>
+                </a:solidFill>
+                <a:latin typeface="Be Vietnam Pro" pitchFamily="34" charset="0"/>
+                <a:ea typeface="Be Vietnam Pro" pitchFamily="34" charset="-122"/>
+                <a:cs typeface="Be Vietnam Pro" pitchFamily="34" charset="-120"/>
+              </a:rPr>
+              <a:t> thập</a:t>
+            </a:r>
+            <a:r>
+              <a:rPr lang="en-US" sz="2700" dirty="0" spc="-2" kern="0">
+                <a:solidFill>
+                  <a:srgbClr val="3B3A37"/>
+                </a:solidFill>
+                <a:latin typeface="Be Vietnam Pro" pitchFamily="34" charset="0"/>
+                <a:ea typeface="Be Vietnam Pro" pitchFamily="34" charset="-122"/>
+                <a:cs typeface="Be Vietnam Pro" pitchFamily="34" charset="-120"/>
+              </a:rPr>
+              <a:t> phân</a:t>
+            </a:r>
+            <a:r>
               <a:rPr lang="en-US" sz="2700" dirty="0" spc="-13" kern="0">
                 <a:solidFill>
                   <a:srgbClr val="3B3A37"/>
@@ -2845,10 +2867,10 @@
                 <a:ea typeface="Be Vietnam Pro" pitchFamily="34" charset="-122"/>
                 <a:cs typeface="Be Vietnam Pro" pitchFamily="34" charset="-120"/>
               </a:rPr>
-              <a:t> số</a:t>
-            </a:r>
-            <a:r>
-              <a:rPr lang="en-US" sz="2700" dirty="0" spc="0" kern="0">
+              <a:t> hay</a:t>
+            </a:r>
+            <a:r>
+              <a:rPr lang="en-US" sz="2700" dirty="0" spc="-8" kern="0">
                 <a:solidFill>
                   <a:srgbClr val="3B3A37"/>
                 </a:solidFill>
@@ -2856,10 +2878,10 @@
                 <a:ea typeface="Be Vietnam Pro" pitchFamily="34" charset="-122"/>
                 <a:cs typeface="Be Vietnam Pro" pitchFamily="34" charset="-120"/>
               </a:rPr>
-              <a:t> thập</a:t>
-            </a:r>
-            <a:r>
-              <a:rPr lang="en-US" sz="2700" dirty="0" spc="-2" kern="0">
+              <a:t> ba</a:t>
+            </a:r>
+            <a:r>
+              <a:rPr lang="en-US" sz="2700" dirty="0" spc="7" kern="0">
                 <a:solidFill>
                   <a:srgbClr val="3B3A37"/>
                 </a:solidFill>
@@ -2867,73 +2889,7 @@
                 <a:ea typeface="Be Vietnam Pro" pitchFamily="34" charset="-122"/>
                 <a:cs typeface="Be Vietnam Pro" pitchFamily="34" charset="-120"/>
               </a:rPr>
-              <a:t> phân.</a:t>
-            </a:r>
-            <a:r>
-              <a:rPr lang="en-US" sz="2700" dirty="0" spc="-3" kern="0">
-                <a:solidFill>
-                  <a:srgbClr val="3B3A37"/>
-                </a:solidFill>
-                <a:latin typeface="Be Vietnam Pro" pitchFamily="34" charset="0"/>
-                <a:ea typeface="Be Vietnam Pro" pitchFamily="34" charset="-122"/>
-                <a:cs typeface="Be Vietnam Pro" pitchFamily="34" charset="-120"/>
-              </a:rPr>
-              <a:t> Không</a:t>
-            </a:r>
-            <a:r>
-              <a:rPr lang="en-US" sz="2700" dirty="0" spc="-1" kern="0">
-                <a:solidFill>
-                  <a:srgbClr val="3B3A37"/>
-                </a:solidFill>
-                <a:latin typeface="Be Vietnam Pro" pitchFamily="34" charset="0"/>
-                <a:ea typeface="Be Vietnam Pro" pitchFamily="34" charset="-122"/>
-                <a:cs typeface="Be Vietnam Pro" pitchFamily="34" charset="-120"/>
-              </a:rPr>
-              <a:t> phải</a:t>
-            </a:r>
-            <a:r>
-              <a:rPr lang="en-US" sz="2700" dirty="0" spc="-7" kern="0">
-                <a:solidFill>
-                  <a:srgbClr val="3B3A37"/>
-                </a:solidFill>
-                <a:latin typeface="Be Vietnam Pro" pitchFamily="34" charset="0"/>
-                <a:ea typeface="Be Vietnam Pro" pitchFamily="34" charset="-122"/>
-                <a:cs typeface="Be Vietnam Pro" pitchFamily="34" charset="-120"/>
-              </a:rPr>
-              <a:t> ba</a:t>
-            </a:r>
-            <a:r>
-              <a:rPr lang="en-US" sz="2700" dirty="0" spc="8" kern="0">
-                <a:solidFill>
-                  <a:srgbClr val="3B3A37"/>
-                </a:solidFill>
-                <a:latin typeface="Be Vietnam Pro" pitchFamily="34" charset="0"/>
-                <a:ea typeface="Be Vietnam Pro" pitchFamily="34" charset="-122"/>
-                <a:cs typeface="Be Vietnam Pro" pitchFamily="34" charset="-120"/>
-              </a:rPr>
-              <a:t> bước</a:t>
-            </a:r>
-            <a:r>
-              <a:rPr lang="en-US" sz="2700" dirty="0" spc="-2" kern="0">
-                <a:solidFill>
-                  <a:srgbClr val="3B3A37"/>
-                </a:solidFill>
-                <a:latin typeface="Be Vietnam Pro" pitchFamily="34" charset="0"/>
-                <a:ea typeface="Be Vietnam Pro" pitchFamily="34" charset="-122"/>
-                <a:cs typeface="Be Vietnam Pro" pitchFamily="34" charset="-120"/>
-              </a:rPr>
-              <a:t> liên</a:t>
-            </a:r>
-            <a:r>
-              <a:rPr lang="en-US" sz="2700" dirty="0" spc="-1" kern="0">
-                <a:solidFill>
-                  <a:srgbClr val="3B3A37"/>
-                </a:solidFill>
-                <a:latin typeface="Be Vietnam Pro" pitchFamily="34" charset="0"/>
-                <a:ea typeface="Be Vietnam Pro" pitchFamily="34" charset="-122"/>
-                <a:cs typeface="Be Vietnam Pro" pitchFamily="34" charset="-120"/>
-              </a:rPr>
-              <a:t> tiếp.</a:t>
+              <a:t> bước.</a:t>
             </a:r>
             <a:endParaRPr lang="en-US" sz="2700" dirty="0"/>
           </a:p>
@@ -8866,7 +8822,7 @@
               <a:t> 2.4.7,</a:t>
             </a:r>
             <a:r>
-              <a:rPr lang="en-US" sz="5700" dirty="0" spc="-1" kern="0">
+              <a:rPr lang="en-US" sz="5700" dirty="0" spc="-5" kern="0">
                 <a:solidFill>
                   <a:srgbClr val="14161C"/>
                 </a:solidFill>
@@ -8874,10 +8830,10 @@
                 <a:ea typeface="Bricolage Grotesque ExtraBold" pitchFamily="34" charset="-122"/>
                 <a:cs typeface="Bricolage Grotesque ExtraBold" pitchFamily="34" charset="-120"/>
               </a:rPr>
-              <a:t> nhóm</a:t>
-            </a:r>
-            <a:r>
-              <a:rPr lang="en-US" sz="5700" dirty="0" spc="-4" kern="0">
+              <a:t> bỏ</a:t>
+            </a:r>
+            <a:r>
+              <a:rPr lang="en-US" sz="5700" dirty="0" spc="-12" kern="0">
                 <a:solidFill>
                   <a:srgbClr val="14161C"/>
                 </a:solidFill>
@@ -8885,10 +8841,10 @@
                 <a:ea typeface="Bricolage Grotesque ExtraBold" pitchFamily="34" charset="-122"/>
                 <a:cs typeface="Bricolage Grotesque ExtraBold" pitchFamily="34" charset="-120"/>
               </a:rPr>
-              <a:t> bỏ</a:t>
-            </a:r>
-            <a:r>
-              <a:rPr lang="en-US" sz="5700" dirty="0" spc="-12" kern="0">
+              <a:t> một</a:t>
+            </a:r>
+            <a:r>
+              <a:rPr lang="en-US" sz="5700" dirty="0" spc="0" kern="0">
                 <a:solidFill>
                   <a:srgbClr val="14161C"/>
                 </a:solidFill>
@@ -8896,10 +8852,10 @@
                 <a:ea typeface="Bricolage Grotesque ExtraBold" pitchFamily="34" charset="-122"/>
                 <a:cs typeface="Bricolage Grotesque ExtraBold" pitchFamily="34" charset="-120"/>
               </a:rPr>
-              <a:t> một</a:t>
-            </a:r>
-            <a:r>
-              <a:rPr lang="en-US" sz="5700" dirty="0" spc="0" kern="0">
+              <a:t> tham</a:t>
+            </a:r>
+            <a:r>
+              <a:rPr lang="en-US" sz="5700" dirty="0" spc="-5" kern="0">
                 <a:solidFill>
                   <a:srgbClr val="14161C"/>
                 </a:solidFill>
@@ -8907,10 +8863,10 @@
                 <a:ea typeface="Bricolage Grotesque ExtraBold" pitchFamily="34" charset="-122"/>
                 <a:cs typeface="Bricolage Grotesque ExtraBold" pitchFamily="34" charset="-120"/>
               </a:rPr>
-              <a:t> tham</a:t>
-            </a:r>
-            <a:r>
-              <a:rPr lang="en-US" sz="5700" dirty="0" spc="-5" kern="0">
+              <a:t> số</a:t>
+            </a:r>
+            <a:r>
+              <a:rPr lang="en-US" sz="5700" dirty="0" spc="-1" kern="0">
                 <a:solidFill>
                   <a:srgbClr val="14161C"/>
                 </a:solidFill>
@@ -8918,10 +8874,10 @@
                 <a:ea typeface="Bricolage Grotesque ExtraBold" pitchFamily="34" charset="-122"/>
                 <a:cs typeface="Bricolage Grotesque ExtraBold" pitchFamily="34" charset="-120"/>
               </a:rPr>
-              <a:t> số</a:t>
-            </a:r>
-            <a:r>
-              <a:rPr lang="en-US" sz="5700" dirty="0" spc="-1" kern="0">
+              <a:t> công</a:t>
+            </a:r>
+            <a:r>
+              <a:rPr lang="en-US" sz="5700" dirty="0" spc="-3" kern="0">
                 <a:solidFill>
                   <a:srgbClr val="14161C"/>
                 </a:solidFill>
@@ -8929,10 +8885,10 @@
                 <a:ea typeface="Bricolage Grotesque ExtraBold" pitchFamily="34" charset="-122"/>
                 <a:cs typeface="Bricolage Grotesque ExtraBold" pitchFamily="34" charset="-120"/>
               </a:rPr>
-              <a:t> công</a:t>
-            </a:r>
-            <a:r>
-              <a:rPr lang="en-US" sz="5700" dirty="0" spc="-2" kern="0">
+              <a:t> khai.</a:t>
+            </a:r>
+            <a:r>
+              <a:rPr lang="en-US" sz="5700" dirty="0" spc="0" kern="0">
                 <a:solidFill>
                   <a:srgbClr val="14161C"/>
                 </a:solidFill>
@@ -8940,43 +8896,10 @@
                 <a:ea typeface="Bricolage Grotesque ExtraBold" pitchFamily="34" charset="-122"/>
                 <a:cs typeface="Bricolage Grotesque ExtraBold" pitchFamily="34" charset="-120"/>
               </a:rPr>
-              <a:t> khai</a:t>
-            </a:r>
-            <a:r>
-              <a:rPr lang="en-US" sz="5700" dirty="0" spc="7" kern="0">
-                <a:solidFill>
-                  <a:srgbClr val="14161C"/>
-                </a:solidFill>
-                <a:latin typeface="Bricolage Grotesque ExtraBold" pitchFamily="34" charset="0"/>
-                <a:ea typeface="Bricolage Grotesque ExtraBold" pitchFamily="34" charset="-122"/>
-                <a:cs typeface="Bricolage Grotesque ExtraBold" pitchFamily="34" charset="-120"/>
-              </a:rPr>
-              <a:t> đang</a:t>
-            </a:r>
-            <a:r>
-              <a:rPr lang="en-US" sz="5700" dirty="0" spc="0" kern="0">
-                <a:solidFill>
-                  <a:srgbClr val="14161C"/>
-                </a:solidFill>
-                <a:latin typeface="Bricolage Grotesque ExtraBold" pitchFamily="34" charset="0"/>
-                <a:ea typeface="Bricolage Grotesque ExtraBold" pitchFamily="34" charset="-122"/>
-                <a:cs typeface="Bricolage Grotesque ExtraBold" pitchFamily="34" charset="-120"/>
-              </a:rPr>
-              <a:t> dùng. Chọn</a:t>
-            </a:r>
-            <a:r>
-              <a:rPr lang="en-US" sz="5700" dirty="0" spc="-1" kern="0">
-                <a:solidFill>
-                  <a:srgbClr val="14161C"/>
-                </a:solidFill>
-                <a:latin typeface="Bricolage Grotesque ExtraBold" pitchFamily="34" charset="0"/>
-                <a:ea typeface="Bricolage Grotesque ExtraBold" pitchFamily="34" charset="-122"/>
-                <a:cs typeface="Bricolage Grotesque ExtraBold" pitchFamily="34" charset="-120"/>
-              </a:rPr>
-              <a:t> thẻ</a:t>
-            </a:r>
-            <a:r>
-              <a:rPr lang="en-US" sz="5700" dirty="0" spc="-36" kern="0">
+              <a:t> Thẻ</a:t>
+            </a:r>
+            <a:r>
+              <a:rPr lang="en-US" sz="5700" dirty="0" spc="-35" kern="0">
                 <a:solidFill>
                   <a:srgbClr val="14161C"/>
                 </a:solidFill>
@@ -9132,6 +9055,17 @@
               <a:buNone/>
             </a:pPr>
             <a:r>
+              <a:rPr lang="en-US" sz="3000" dirty="0" spc="-2" kern="0">
+                <a:solidFill>
+                  <a:srgbClr val="F3EEE3"/>
+                </a:solidFill>
+                <a:latin typeface="Be Vietnam Pro" pitchFamily="34" charset="0"/>
+                <a:ea typeface="Be Vietnam Pro" pitchFamily="34" charset="-122"/>
+                <a:cs typeface="Be Vietnam Pro" pitchFamily="34" charset="-120"/>
+              </a:rPr>
+              <a:t>MAJOR,</a:t>
+            </a:r>
+            <a:r>
               <a:rPr lang="en-US" sz="3000" dirty="0" spc="0" kern="0">
                 <a:solidFill>
                   <a:srgbClr val="F3EEE3"/>
@@ -9140,10 +9074,10 @@
                 <a:ea typeface="Be Vietnam Pro" pitchFamily="34" charset="-122"/>
                 <a:cs typeface="Be Vietnam Pro" pitchFamily="34" charset="-120"/>
               </a:rPr>
-              <a:t>Thẻ</a:t>
-            </a:r>
-            <a:r>
-              <a:rPr lang="en-US" sz="3000" dirty="0" spc="-1" kern="0">
+              <a:t> nếu</a:t>
+            </a:r>
+            <a:r>
+              <a:rPr lang="en-US" sz="3000" dirty="0" spc="1" kern="0">
                 <a:solidFill>
                   <a:srgbClr val="F3EEE3"/>
                 </a:solidFill>
@@ -9151,10 +9085,10 @@
                 <a:ea typeface="Be Vietnam Pro" pitchFamily="34" charset="-122"/>
                 <a:cs typeface="Be Vietnam Pro" pitchFamily="34" charset="-120"/>
               </a:rPr>
-              <a:t> MAJOR, nếu</a:t>
-            </a:r>
-            <a:r>
-              <a:rPr lang="en-US" sz="3000" dirty="0" spc="2" kern="0">
+              <a:t> không</a:t>
+            </a:r>
+            <a:r>
+              <a:rPr lang="en-US" sz="3000" dirty="0" spc="8" kern="0">
                 <a:solidFill>
                   <a:srgbClr val="F3EEE3"/>
                 </a:solidFill>
@@ -9162,10 +9096,10 @@
                 <a:ea typeface="Be Vietnam Pro" pitchFamily="34" charset="-122"/>
                 <a:cs typeface="Be Vietnam Pro" pitchFamily="34" charset="-120"/>
               </a:rPr>
-              <a:t> không</a:t>
-            </a:r>
-            <a:r>
-              <a:rPr lang="en-US" sz="3000" dirty="0" spc="7" kern="0">
+              <a:t> tương</a:t>
+            </a:r>
+            <a:r>
+              <a:rPr lang="en-US" sz="3000" dirty="0" spc="0" kern="0">
                 <a:solidFill>
                   <a:srgbClr val="F3EEE3"/>
                 </a:solidFill>
@@ -9173,10 +9107,10 @@
                 <a:ea typeface="Be Vietnam Pro" pitchFamily="34" charset="-122"/>
                 <a:cs typeface="Be Vietnam Pro" pitchFamily="34" charset="-120"/>
               </a:rPr>
-              <a:t> tương</a:t>
-            </a:r>
-            <a:r>
-              <a:rPr lang="en-US" sz="3000" dirty="0" spc="0" kern="0">
+              <a:t> thích</a:t>
+            </a:r>
+            <a:r>
+              <a:rPr lang="en-US" sz="3000" dirty="0" spc="3" kern="0">
                 <a:solidFill>
                   <a:srgbClr val="F3EEE3"/>
                 </a:solidFill>
@@ -9184,10 +9118,10 @@
                 <a:ea typeface="Be Vietnam Pro" pitchFamily="34" charset="-122"/>
                 <a:cs typeface="Be Vietnam Pro" pitchFamily="34" charset="-120"/>
               </a:rPr>
-              <a:t> thích</a:t>
-            </a:r>
-            <a:r>
-              <a:rPr lang="en-US" sz="3000" dirty="0" spc="-3" kern="0">
+              <a:t> hợp</a:t>
+            </a:r>
+            <a:r>
+              <a:rPr lang="en-US" sz="3000" dirty="0" spc="13" kern="0">
                 <a:solidFill>
                   <a:srgbClr val="F3EEE3"/>
                 </a:solidFill>
@@ -9195,32 +9129,10 @@
                 <a:ea typeface="Be Vietnam Pro" pitchFamily="34" charset="-122"/>
                 <a:cs typeface="Be Vietnam Pro" pitchFamily="34" charset="-120"/>
               </a:rPr>
-              <a:t> theo</a:t>
-            </a:r>
-            <a:r>
-              <a:rPr lang="en-US" sz="3000" dirty="0" spc="3" kern="0">
-                <a:solidFill>
-                  <a:srgbClr val="F3EEE3"/>
-                </a:solidFill>
-                <a:latin typeface="Be Vietnam Pro" pitchFamily="34" charset="0"/>
-                <a:ea typeface="Be Vietnam Pro" pitchFamily="34" charset="-122"/>
-                <a:cs typeface="Be Vietnam Pro" pitchFamily="34" charset="-120"/>
-              </a:rPr>
-              <a:t> hợp</a:t>
-            </a:r>
-            <a:r>
-              <a:rPr lang="en-US" sz="3000" dirty="0" spc="13" kern="0">
-                <a:solidFill>
-                  <a:srgbClr val="F3EEE3"/>
-                </a:solidFill>
-                <a:latin typeface="Be Vietnam Pro" pitchFamily="34" charset="0"/>
-                <a:ea typeface="Be Vietnam Pro" pitchFamily="34" charset="-122"/>
-                <a:cs typeface="Be Vietnam Pro" pitchFamily="34" charset="-120"/>
-              </a:rPr>
               <a:t> đồng</a:t>
             </a:r>
             <a:r>
-              <a:rPr lang="en-US" sz="3000" dirty="0" spc="19" kern="0">
+              <a:rPr lang="en-US" sz="3000" dirty="0" spc="20" kern="0">
                 <a:solidFill>
                   <a:srgbClr val="F3EEE3"/>
                 </a:solidFill>

--- a/system-design-101/vi/lessons/sd-01-024/slides/sd-01-024.pptx
+++ b/system-design-101/vi/lessons/sd-01-024/slides/sd-01-024.pptx
@@ -8780,8 +8780,8 @@
         </p:nvSpPr>
         <p:spPr>
           <a:xfrm>
-            <a:off x="914400" y="1524000"/>
-            <a:ext cx="16459200" cy="1905000"/>
+            <a:off x="914400" y="1390650"/>
+            <a:ext cx="16459200" cy="2047875"/>
           </a:xfrm>
           <a:prstGeom prst="rect">
             <a:avLst/>
@@ -8790,17 +8790,17 @@
           <a:ln/>
         </p:spPr>
         <p:txBody>
-          <a:bodyPr wrap="square" lIns="0" tIns="36195" rIns="0" bIns="-36195" rtlCol="0" anchor="t"/>
+          <a:bodyPr wrap="square" lIns="0" tIns="43815" rIns="0" bIns="-43815" rtlCol="0" anchor="t"/>
           <a:lstStyle/>
           <a:p>
             <a:pPr algn="l" indent="0" marL="0">
               <a:lnSpc>
-                <a:spcPts val="6270"/>
+                <a:spcPts val="7590"/>
               </a:lnSpc>
               <a:buNone/>
             </a:pPr>
             <a:r>
-              <a:rPr lang="en-US" sz="5700" dirty="0" spc="-42" kern="0">
+              <a:rPr lang="en-US" sz="6900" dirty="0" spc="-59" kern="0">
                 <a:solidFill>
                   <a:srgbClr val="14161C"/>
                 </a:solidFill>
@@ -8811,7 +8811,7 @@
               <a:t>Từ</a:t>
             </a:r>
             <a:r>
-              <a:rPr lang="en-US" sz="5700" dirty="0" spc="-100" kern="0">
+              <a:rPr lang="en-US" sz="6900" dirty="0" spc="-122" kern="0">
                 <a:solidFill>
                   <a:srgbClr val="14161C"/>
                 </a:solidFill>
@@ -8822,7 +8822,7 @@
               <a:t> 2.4.7,</a:t>
             </a:r>
             <a:r>
-              <a:rPr lang="en-US" sz="5700" dirty="0" spc="-5" kern="0">
+              <a:rPr lang="en-US" sz="6900" dirty="0" spc="-1" kern="0">
                 <a:solidFill>
                   <a:srgbClr val="14161C"/>
                 </a:solidFill>
@@ -8833,7 +8833,7 @@
               <a:t> bỏ</a:t>
             </a:r>
             <a:r>
-              <a:rPr lang="en-US" sz="5700" dirty="0" spc="-12" kern="0">
+              <a:rPr lang="en-US" sz="6900" dirty="0" spc="-11" kern="0">
                 <a:solidFill>
                   <a:srgbClr val="14161C"/>
                 </a:solidFill>
@@ -8844,7 +8844,7 @@
               <a:t> một</a:t>
             </a:r>
             <a:r>
-              <a:rPr lang="en-US" sz="5700" dirty="0" spc="0" kern="0">
+              <a:rPr lang="en-US" sz="6900" dirty="0" spc="1" kern="0">
                 <a:solidFill>
                   <a:srgbClr val="14161C"/>
                 </a:solidFill>
@@ -8855,7 +8855,7 @@
               <a:t> tham</a:t>
             </a:r>
             <a:r>
-              <a:rPr lang="en-US" sz="5700" dirty="0" spc="-5" kern="0">
+              <a:rPr lang="en-US" sz="6900" dirty="0" spc="2" kern="0">
                 <a:solidFill>
                   <a:srgbClr val="14161C"/>
                 </a:solidFill>
@@ -8866,7 +8866,7 @@
               <a:t> số</a:t>
             </a:r>
             <a:r>
-              <a:rPr lang="en-US" sz="5700" dirty="0" spc="-1" kern="0">
+              <a:rPr lang="en-US" sz="6900" dirty="0" spc="0" kern="0">
                 <a:solidFill>
                   <a:srgbClr val="14161C"/>
                 </a:solidFill>
@@ -8877,7 +8877,7 @@
               <a:t> công</a:t>
             </a:r>
             <a:r>
-              <a:rPr lang="en-US" sz="5700" dirty="0" spc="-3" kern="0">
+              <a:rPr lang="en-US" sz="6900" dirty="0" spc="-2" kern="0">
                 <a:solidFill>
                   <a:srgbClr val="14161C"/>
                 </a:solidFill>
@@ -8888,7 +8888,7 @@
               <a:t> khai.</a:t>
             </a:r>
             <a:r>
-              <a:rPr lang="en-US" sz="5700" dirty="0" spc="0" kern="0">
+              <a:rPr lang="en-US" sz="6900" dirty="0" spc="1" kern="0">
                 <a:solidFill>
                   <a:srgbClr val="14161C"/>
                 </a:solidFill>
@@ -8899,7 +8899,7 @@
               <a:t> Thẻ</a:t>
             </a:r>
             <a:r>
-              <a:rPr lang="en-US" sz="5700" dirty="0" spc="-35" kern="0">
+              <a:rPr lang="en-US" sz="6900" dirty="0" spc="-39" kern="0">
                 <a:solidFill>
                   <a:srgbClr val="14161C"/>
                 </a:solidFill>
@@ -8909,7 +8909,7 @@
               </a:rPr>
               <a:t> nào?</a:t>
             </a:r>
-            <a:endParaRPr lang="en-US" sz="5700" dirty="0"/>
+            <a:endParaRPr lang="en-US" sz="6900" dirty="0"/>
           </a:p>
         </p:txBody>
       </p:sp>

--- a/system-design-101/vi/lessons/sd-01-024/slides/sd-01-024.pptx
+++ b/system-design-101/vi/lessons/sd-01-024/slides/sd-01-024.pptx
@@ -6643,8 +6643,8 @@
         </p:nvSpPr>
         <p:spPr>
           <a:xfrm>
-            <a:off x="11049000" y="1905000"/>
-            <a:ext cx="6286500" cy="3143250"/>
+            <a:off x="11049000" y="1619250"/>
+            <a:ext cx="6286500" cy="3905250"/>
           </a:xfrm>
           <a:prstGeom prst="rect">
             <a:avLst/>
@@ -6653,17 +6653,17 @@
           <a:ln/>
         </p:spPr>
         <p:txBody>
-          <a:bodyPr wrap="square" lIns="0" tIns="34290" rIns="0" bIns="-34290" rtlCol="0" anchor="t"/>
+          <a:bodyPr wrap="square" lIns="0" tIns="43815" rIns="0" bIns="-43815" rtlCol="0" anchor="t"/>
           <a:lstStyle/>
           <a:p>
             <a:pPr algn="l" indent="0" marL="0">
               <a:lnSpc>
-                <a:spcPts val="5940"/>
+                <a:spcPts val="7590"/>
               </a:lnSpc>
               <a:buNone/>
             </a:pPr>
             <a:r>
-              <a:rPr lang="en-US" sz="5400" dirty="0" spc="-1" kern="0">
+              <a:rPr lang="en-US" sz="6900" dirty="0" spc="2" kern="0">
                 <a:solidFill>
                   <a:srgbClr val="14161C"/>
                 </a:solidFill>
@@ -6671,10 +6671,10 @@
                 <a:ea typeface="Bricolage Grotesque ExtraBold" pitchFamily="34" charset="-122"/>
                 <a:cs typeface="Bricolage Grotesque ExtraBold" pitchFamily="34" charset="-120"/>
               </a:rPr>
-              <a:t>API công</a:t>
-            </a:r>
-            <a:r>
-              <a:rPr lang="en-US" sz="5400" dirty="0" spc="-2" kern="0">
+              <a:t>API</a:t>
+            </a:r>
+            <a:r>
+              <a:rPr lang="en-US" sz="6900" dirty="0" spc="-1" kern="0">
                 <a:solidFill>
                   <a:srgbClr val="14161C"/>
                 </a:solidFill>
@@ -6682,10 +6682,10 @@
                 <a:ea typeface="Bricolage Grotesque ExtraBold" pitchFamily="34" charset="-122"/>
                 <a:cs typeface="Bricolage Grotesque ExtraBold" pitchFamily="34" charset="-120"/>
               </a:rPr>
-              <a:t> khai</a:t>
-            </a:r>
-            <a:r>
-              <a:rPr lang="en-US" sz="5400" dirty="0" spc="8" kern="0">
+              <a:t> công</a:t>
+            </a:r>
+            <a:r>
+              <a:rPr lang="en-US" sz="6900" dirty="0" spc="1" kern="0">
                 <a:solidFill>
                   <a:srgbClr val="14161C"/>
                 </a:solidFill>
@@ -6693,10 +6693,10 @@
                 <a:ea typeface="Bricolage Grotesque ExtraBold" pitchFamily="34" charset="-122"/>
                 <a:cs typeface="Bricolage Grotesque ExtraBold" pitchFamily="34" charset="-120"/>
               </a:rPr>
-              <a:t> đổi,</a:t>
-            </a:r>
-            <a:r>
-              <a:rPr lang="en-US" sz="5400" dirty="0" spc="-2" kern="0">
+              <a:t> khai</a:t>
+            </a:r>
+            <a:r>
+              <a:rPr lang="en-US" sz="6900" dirty="0" spc="7" kern="0">
                 <a:solidFill>
                   <a:srgbClr val="14161C"/>
                 </a:solidFill>
@@ -6704,10 +6704,10 @@
                 <a:ea typeface="Bricolage Grotesque ExtraBold" pitchFamily="34" charset="-122"/>
                 <a:cs typeface="Bricolage Grotesque ExtraBold" pitchFamily="34" charset="-120"/>
               </a:rPr>
-              <a:t> không</a:t>
-            </a:r>
-            <a:r>
-              <a:rPr lang="en-US" sz="5400" dirty="0" spc="-58" kern="0">
+              <a:t> đổi,</a:t>
+            </a:r>
+            <a:r>
+              <a:rPr lang="en-US" sz="6900" dirty="0" spc="0" kern="0">
                 <a:solidFill>
                   <a:srgbClr val="14161C"/>
                 </a:solidFill>
@@ -6715,10 +6715,10 @@
                 <a:ea typeface="Bricolage Grotesque ExtraBold" pitchFamily="34" charset="-122"/>
                 <a:cs typeface="Bricolage Grotesque ExtraBold" pitchFamily="34" charset="-120"/>
               </a:rPr>
-              <a:t> tương</a:t>
-            </a:r>
-            <a:r>
-              <a:rPr lang="en-US" sz="5400" dirty="0" spc="-2" kern="0">
+              <a:t> không</a:t>
+            </a:r>
+            <a:r>
+              <a:rPr lang="en-US" sz="6900" dirty="0" spc="-72" kern="0">
                 <a:solidFill>
                   <a:srgbClr val="14161C"/>
                 </a:solidFill>
@@ -6726,10 +6726,10 @@
                 <a:ea typeface="Bricolage Grotesque ExtraBold" pitchFamily="34" charset="-122"/>
                 <a:cs typeface="Bricolage Grotesque ExtraBold" pitchFamily="34" charset="-120"/>
               </a:rPr>
-              <a:t> thích</a:t>
-            </a:r>
-            <a:r>
-              <a:rPr lang="en-US" sz="5400" dirty="0" spc="-66" kern="0">
+              <a:t> tương</a:t>
+            </a:r>
+            <a:r>
+              <a:rPr lang="en-US" sz="6900" dirty="0" spc="0" kern="0">
                 <a:solidFill>
                   <a:srgbClr val="14161C"/>
                 </a:solidFill>
@@ -6737,9 +6737,20 @@
                 <a:ea typeface="Bricolage Grotesque ExtraBold" pitchFamily="34" charset="-122"/>
                 <a:cs typeface="Bricolage Grotesque ExtraBold" pitchFamily="34" charset="-120"/>
               </a:rPr>
+              <a:t> thích</a:t>
+            </a:r>
+            <a:r>
+              <a:rPr lang="en-US" sz="6900" dirty="0" spc="-84" kern="0">
+                <a:solidFill>
+                  <a:srgbClr val="14161C"/>
+                </a:solidFill>
+                <a:latin typeface="Bricolage Grotesque ExtraBold" pitchFamily="34" charset="0"/>
+                <a:ea typeface="Bricolage Grotesque ExtraBold" pitchFamily="34" charset="-122"/>
+                <a:cs typeface="Bricolage Grotesque ExtraBold" pitchFamily="34" charset="-120"/>
+              </a:rPr>
               <a:t> ngược</a:t>
             </a:r>
-            <a:endParaRPr lang="en-US" sz="5400" dirty="0"/>
+            <a:endParaRPr lang="en-US" sz="6900" dirty="0"/>
           </a:p>
         </p:txBody>
       </p:sp>
@@ -6751,12 +6762,12 @@
         </p:nvSpPr>
         <p:spPr>
           <a:xfrm>
-            <a:off x="11049000" y="5715000"/>
-            <a:ext cx="6286500" cy="3143250"/>
+            <a:off x="11049000" y="5905500"/>
+            <a:ext cx="6286500" cy="2952750"/>
           </a:xfrm>
           <a:prstGeom prst="roundRect">
             <a:avLst>
-              <a:gd name="adj" fmla="val 8485"/>
+              <a:gd name="adj" fmla="val 9032"/>
             </a:avLst>
           </a:prstGeom>
           <a:solidFill>
@@ -6778,7 +6789,7 @@
         </p:nvSpPr>
         <p:spPr>
           <a:xfrm>
-            <a:off x="11430000" y="6000750"/>
+            <a:off x="11430000" y="6191250"/>
             <a:ext cx="5619750" cy="381000"/>
           </a:xfrm>
           <a:prstGeom prst="rect">
@@ -6839,8 +6850,8 @@
         </p:nvSpPr>
         <p:spPr>
           <a:xfrm>
-            <a:off x="11430000" y="6572250"/>
-            <a:ext cx="5619750" cy="1905000"/>
+            <a:off x="11430000" y="6762750"/>
+            <a:ext cx="5619750" cy="1809750"/>
           </a:xfrm>
           <a:prstGeom prst="rect">
             <a:avLst/>
